--- a/documentation/Cover.pptx
+++ b/documentation/Cover.pptx
@@ -3344,10 +3344,10 @@
       </p:grpSpPr>
       <p:grpSp>
         <p:nvGrpSpPr>
-          <p:cNvPr id="44" name="Group 43">
-            <a:extLst>
-              <a:ext uri="{FF2B5EF4-FFF2-40B4-BE49-F238E27FC236}">
-                <a16:creationId xmlns:a16="http://schemas.microsoft.com/office/drawing/2014/main" id="{3BF66E5E-9397-6A28-9961-D7AD9EE44F27}"/>
+          <p:cNvPr id="47" name="Group 46">
+            <a:extLst>
+              <a:ext uri="{FF2B5EF4-FFF2-40B4-BE49-F238E27FC236}">
+                <a16:creationId xmlns:a16="http://schemas.microsoft.com/office/drawing/2014/main" id="{F7EBACF0-AB59-3196-0616-621CE1AC2AEC}"/>
               </a:ext>
             </a:extLst>
           </p:cNvPr>
@@ -3362,61 +3362,12 @@
             <a:chExt cx="4290646" cy="5430129"/>
           </a:xfrm>
         </p:grpSpPr>
-        <p:sp>
-          <p:nvSpPr>
-            <p:cNvPr id="43" name="Rectangle 42">
+        <p:grpSp>
+          <p:nvGrpSpPr>
+            <p:cNvPr id="44" name="Group 43">
               <a:extLst>
                 <a:ext uri="{FF2B5EF4-FFF2-40B4-BE49-F238E27FC236}">
-                  <a16:creationId xmlns:a16="http://schemas.microsoft.com/office/drawing/2014/main" id="{7072C86E-A11A-8FA6-E27F-36131645A30C}"/>
-                </a:ext>
-              </a:extLst>
-            </p:cNvPr>
-            <p:cNvSpPr/>
-            <p:nvPr/>
-          </p:nvSpPr>
-          <p:spPr>
-            <a:xfrm>
-              <a:off x="4149969" y="914400"/>
-              <a:ext cx="4290646" cy="5430129"/>
-            </a:xfrm>
-            <a:prstGeom prst="rect">
-              <a:avLst/>
-            </a:prstGeom>
-            <a:solidFill>
-              <a:schemeClr val="bg1"/>
-            </a:solidFill>
-          </p:spPr>
-          <p:style>
-            <a:lnRef idx="2">
-              <a:schemeClr val="accent1">
-                <a:shade val="15000"/>
-              </a:schemeClr>
-            </a:lnRef>
-            <a:fillRef idx="1">
-              <a:schemeClr val="accent1"/>
-            </a:fillRef>
-            <a:effectRef idx="0">
-              <a:schemeClr val="accent1"/>
-            </a:effectRef>
-            <a:fontRef idx="minor">
-              <a:schemeClr val="lt1"/>
-            </a:fontRef>
-          </p:style>
-          <p:txBody>
-            <a:bodyPr rtlCol="0" anchor="ctr"/>
-            <a:lstStyle/>
-            <a:p>
-              <a:pPr algn="ctr"/>
-              <a:endParaRPr lang="en-SG"/>
-            </a:p>
-          </p:txBody>
-        </p:sp>
-        <p:grpSp>
-          <p:nvGrpSpPr>
-            <p:cNvPr id="42" name="Group 41">
-              <a:extLst>
-                <a:ext uri="{FF2B5EF4-FFF2-40B4-BE49-F238E27FC236}">
-                  <a16:creationId xmlns:a16="http://schemas.microsoft.com/office/drawing/2014/main" id="{32A3AAC0-3F8F-8C9E-DFFD-52B4D789802D}"/>
+                  <a16:creationId xmlns:a16="http://schemas.microsoft.com/office/drawing/2014/main" id="{3BF66E5E-9397-6A28-9961-D7AD9EE44F27}"/>
                 </a:ext>
               </a:extLst>
             </p:cNvPr>
@@ -3425,263 +3376,18 @@
           </p:nvGrpSpPr>
           <p:grpSpPr>
             <a:xfrm>
-              <a:off x="4436012" y="1183050"/>
-              <a:ext cx="3375667" cy="4874890"/>
-              <a:chOff x="4436012" y="1183050"/>
-              <a:chExt cx="3375667" cy="4874890"/>
+              <a:off x="4149969" y="914400"/>
+              <a:ext cx="4290646" cy="5430129"/>
+              <a:chOff x="4149969" y="914400"/>
+              <a:chExt cx="4290646" cy="5430129"/>
             </a:xfrm>
           </p:grpSpPr>
-          <p:pic>
-            <p:nvPicPr>
-              <p:cNvPr id="5" name="Picture 4">
+          <p:sp>
+            <p:nvSpPr>
+              <p:cNvPr id="43" name="Rectangle 42">
                 <a:extLst>
                   <a:ext uri="{FF2B5EF4-FFF2-40B4-BE49-F238E27FC236}">
-                    <a16:creationId xmlns:a16="http://schemas.microsoft.com/office/drawing/2014/main" id="{F01F73DD-18FC-13F8-EC8B-3A78F2A8A6C5}"/>
-                  </a:ext>
-                </a:extLst>
-              </p:cNvPr>
-              <p:cNvPicPr>
-                <a:picLocks noChangeAspect="1"/>
-              </p:cNvPicPr>
-              <p:nvPr/>
-            </p:nvPicPr>
-            <p:blipFill>
-              <a:blip r:embed="rId2"/>
-              <a:stretch>
-                <a:fillRect/>
-              </a:stretch>
-            </p:blipFill>
-            <p:spPr>
-              <a:xfrm>
-                <a:off x="5843516" y="1183050"/>
-                <a:ext cx="504967" cy="504967"/>
-              </a:xfrm>
-              <a:prstGeom prst="rect">
-                <a:avLst/>
-              </a:prstGeom>
-            </p:spPr>
-          </p:pic>
-          <p:pic>
-            <p:nvPicPr>
-              <p:cNvPr id="9" name="Picture 8">
-                <a:extLst>
-                  <a:ext uri="{FF2B5EF4-FFF2-40B4-BE49-F238E27FC236}">
-                    <a16:creationId xmlns:a16="http://schemas.microsoft.com/office/drawing/2014/main" id="{F982C987-837C-5038-A377-4836BE079D3C}"/>
-                  </a:ext>
-                </a:extLst>
-              </p:cNvPr>
-              <p:cNvPicPr>
-                <a:picLocks noChangeAspect="1"/>
-              </p:cNvPicPr>
-              <p:nvPr/>
-            </p:nvPicPr>
-            <p:blipFill>
-              <a:blip r:embed="rId3"/>
-              <a:stretch>
-                <a:fillRect/>
-              </a:stretch>
-            </p:blipFill>
-            <p:spPr>
-              <a:xfrm>
-                <a:off x="5649605" y="1968205"/>
-                <a:ext cx="892790" cy="892790"/>
-              </a:xfrm>
-              <a:prstGeom prst="rect">
-                <a:avLst/>
-              </a:prstGeom>
-            </p:spPr>
-          </p:pic>
-          <p:pic>
-            <p:nvPicPr>
-              <p:cNvPr id="13" name="Picture 12">
-                <a:extLst>
-                  <a:ext uri="{FF2B5EF4-FFF2-40B4-BE49-F238E27FC236}">
-                    <a16:creationId xmlns:a16="http://schemas.microsoft.com/office/drawing/2014/main" id="{4790AB43-15E0-936B-452E-84E3B6EDD888}"/>
-                  </a:ext>
-                </a:extLst>
-              </p:cNvPr>
-              <p:cNvPicPr>
-                <a:picLocks noChangeAspect="1"/>
-              </p:cNvPicPr>
-              <p:nvPr/>
-            </p:nvPicPr>
-            <p:blipFill>
-              <a:blip r:embed="rId4"/>
-              <a:stretch>
-                <a:fillRect/>
-              </a:stretch>
-            </p:blipFill>
-            <p:spPr>
-              <a:xfrm>
-                <a:off x="5805558" y="3268983"/>
-                <a:ext cx="580884" cy="580884"/>
-              </a:xfrm>
-              <a:prstGeom prst="rect">
-                <a:avLst/>
-              </a:prstGeom>
-            </p:spPr>
-          </p:pic>
-          <p:pic>
-            <p:nvPicPr>
-              <p:cNvPr id="14" name="Picture 13">
-                <a:extLst>
-                  <a:ext uri="{FF2B5EF4-FFF2-40B4-BE49-F238E27FC236}">
-                    <a16:creationId xmlns:a16="http://schemas.microsoft.com/office/drawing/2014/main" id="{B9587755-9C5B-BAAC-F659-AE0743DA9302}"/>
-                  </a:ext>
-                </a:extLst>
-              </p:cNvPr>
-              <p:cNvPicPr>
-                <a:picLocks noChangeAspect="1"/>
-              </p:cNvPicPr>
-              <p:nvPr/>
-            </p:nvPicPr>
-            <p:blipFill>
-              <a:blip r:embed="rId4"/>
-              <a:stretch>
-                <a:fillRect/>
-              </a:stretch>
-            </p:blipFill>
-            <p:spPr>
-              <a:xfrm>
-                <a:off x="5068721" y="4103771"/>
-                <a:ext cx="580884" cy="580884"/>
-              </a:xfrm>
-              <a:prstGeom prst="rect">
-                <a:avLst/>
-              </a:prstGeom>
-            </p:spPr>
-          </p:pic>
-          <p:pic>
-            <p:nvPicPr>
-              <p:cNvPr id="15" name="Picture 14">
-                <a:extLst>
-                  <a:ext uri="{FF2B5EF4-FFF2-40B4-BE49-F238E27FC236}">
-                    <a16:creationId xmlns:a16="http://schemas.microsoft.com/office/drawing/2014/main" id="{F375EECA-5596-0D18-F331-FD9EE08B3213}"/>
-                  </a:ext>
-                </a:extLst>
-              </p:cNvPr>
-              <p:cNvPicPr>
-                <a:picLocks noChangeAspect="1"/>
-              </p:cNvPicPr>
-              <p:nvPr/>
-            </p:nvPicPr>
-            <p:blipFill>
-              <a:blip r:embed="rId4"/>
-              <a:stretch>
-                <a:fillRect/>
-              </a:stretch>
-            </p:blipFill>
-            <p:spPr>
-              <a:xfrm>
-                <a:off x="5805557" y="4103771"/>
-                <a:ext cx="580884" cy="580884"/>
-              </a:xfrm>
-              <a:prstGeom prst="rect">
-                <a:avLst/>
-              </a:prstGeom>
-            </p:spPr>
-          </p:pic>
-          <p:pic>
-            <p:nvPicPr>
-              <p:cNvPr id="16" name="Picture 15">
-                <a:extLst>
-                  <a:ext uri="{FF2B5EF4-FFF2-40B4-BE49-F238E27FC236}">
-                    <a16:creationId xmlns:a16="http://schemas.microsoft.com/office/drawing/2014/main" id="{773884BB-C8ED-56CC-4B34-2AEB1735CD43}"/>
-                  </a:ext>
-                </a:extLst>
-              </p:cNvPr>
-              <p:cNvPicPr>
-                <a:picLocks noChangeAspect="1"/>
-              </p:cNvPicPr>
-              <p:nvPr/>
-            </p:nvPicPr>
-            <p:blipFill>
-              <a:blip r:embed="rId4"/>
-              <a:stretch>
-                <a:fillRect/>
-              </a:stretch>
-            </p:blipFill>
-            <p:spPr>
-              <a:xfrm>
-                <a:off x="6722233" y="4103771"/>
-                <a:ext cx="580884" cy="580884"/>
-              </a:xfrm>
-              <a:prstGeom prst="rect">
-                <a:avLst/>
-              </a:prstGeom>
-            </p:spPr>
-          </p:pic>
-          <p:sp>
-            <p:nvSpPr>
-              <p:cNvPr id="18" name="TextBox 17">
-                <a:extLst>
-                  <a:ext uri="{FF2B5EF4-FFF2-40B4-BE49-F238E27FC236}">
-                    <a16:creationId xmlns:a16="http://schemas.microsoft.com/office/drawing/2014/main" id="{0E8B5177-2A12-58BC-BBF6-8FCBDF10AEF4}"/>
-                  </a:ext>
-                </a:extLst>
-              </p:cNvPr>
-              <p:cNvSpPr txBox="1"/>
-              <p:nvPr/>
-            </p:nvSpPr>
-            <p:spPr>
-              <a:xfrm>
-                <a:off x="6382655" y="4366354"/>
-                <a:ext cx="343364" cy="369332"/>
-              </a:xfrm>
-              <a:prstGeom prst="rect">
-                <a:avLst/>
-              </a:prstGeom>
-              <a:noFill/>
-            </p:spPr>
-            <p:txBody>
-              <a:bodyPr wrap="none" rtlCol="0">
-                <a:spAutoFit/>
-              </a:bodyPr>
-              <a:lstStyle/>
-              <a:p>
-                <a:r>
-                  <a:rPr lang="en-SG" dirty="0"/>
-                  <a:t>…</a:t>
-                </a:r>
-              </a:p>
-            </p:txBody>
-          </p:sp>
-          <p:pic>
-            <p:nvPicPr>
-              <p:cNvPr id="22" name="Picture 21">
-                <a:extLst>
-                  <a:ext uri="{FF2B5EF4-FFF2-40B4-BE49-F238E27FC236}">
-                    <a16:creationId xmlns:a16="http://schemas.microsoft.com/office/drawing/2014/main" id="{C4AD7F46-195D-C98A-52A8-8278CF20E7B7}"/>
-                  </a:ext>
-                </a:extLst>
-              </p:cNvPr>
-              <p:cNvPicPr>
-                <a:picLocks noChangeAspect="1"/>
-              </p:cNvPicPr>
-              <p:nvPr/>
-            </p:nvPicPr>
-            <p:blipFill>
-              <a:blip r:embed="rId5"/>
-              <a:stretch>
-                <a:fillRect/>
-              </a:stretch>
-            </p:blipFill>
-            <p:spPr>
-              <a:xfrm>
-                <a:off x="5713010" y="5291960"/>
-                <a:ext cx="765980" cy="765980"/>
-              </a:xfrm>
-              <a:prstGeom prst="rect">
-                <a:avLst/>
-              </a:prstGeom>
-            </p:spPr>
-          </p:pic>
-          <p:sp>
-            <p:nvSpPr>
-              <p:cNvPr id="23" name="Rectangle: Rounded Corners 22">
-                <a:extLst>
-                  <a:ext uri="{FF2B5EF4-FFF2-40B4-BE49-F238E27FC236}">
-                    <a16:creationId xmlns:a16="http://schemas.microsoft.com/office/drawing/2014/main" id="{9C5157A7-3AF9-AD88-7DA3-9A2B14E18A35}"/>
+                    <a16:creationId xmlns:a16="http://schemas.microsoft.com/office/drawing/2014/main" id="{7072C86E-A11A-8FA6-E27F-36131645A30C}"/>
                   </a:ext>
                 </a:extLst>
               </p:cNvPr>
@@ -3690,18 +3396,15 @@
             </p:nvSpPr>
             <p:spPr>
               <a:xfrm>
-                <a:off x="4436012" y="3193376"/>
-                <a:ext cx="3319976" cy="1644513"/>
+                <a:off x="4149969" y="914400"/>
+                <a:ext cx="4290646" cy="5430129"/>
               </a:xfrm>
-              <a:prstGeom prst="roundRect">
+              <a:prstGeom prst="rect">
                 <a:avLst/>
               </a:prstGeom>
-              <a:noFill/>
-              <a:ln>
-                <a:solidFill>
-                  <a:schemeClr val="tx1"/>
-                </a:solidFill>
-              </a:ln>
+              <a:solidFill>
+                <a:schemeClr val="bg1"/>
+              </a:solidFill>
             </p:spPr>
             <p:style>
               <a:lnRef idx="2">
@@ -3728,484 +3431,802 @@
               </a:p>
             </p:txBody>
           </p:sp>
-          <p:cxnSp>
-            <p:nvCxnSpPr>
-              <p:cNvPr id="25" name="Straight Arrow Connector 24">
+          <p:grpSp>
+            <p:nvGrpSpPr>
+              <p:cNvPr id="42" name="Group 41">
                 <a:extLst>
                   <a:ext uri="{FF2B5EF4-FFF2-40B4-BE49-F238E27FC236}">
-                    <a16:creationId xmlns:a16="http://schemas.microsoft.com/office/drawing/2014/main" id="{C09E58CC-E959-E282-0600-1BE22D435C82}"/>
+                    <a16:creationId xmlns:a16="http://schemas.microsoft.com/office/drawing/2014/main" id="{32A3AAC0-3F8F-8C9E-DFFD-52B4D789802D}"/>
                   </a:ext>
                 </a:extLst>
               </p:cNvPr>
-              <p:cNvCxnSpPr>
-                <a:cxnSpLocks/>
-              </p:cNvCxnSpPr>
+              <p:cNvGrpSpPr/>
               <p:nvPr/>
-            </p:nvCxnSpPr>
-            <p:spPr>
+            </p:nvGrpSpPr>
+            <p:grpSpPr>
               <a:xfrm>
-                <a:off x="6096000" y="1707472"/>
-                <a:ext cx="0" cy="307075"/>
+                <a:off x="4436012" y="1183050"/>
+                <a:ext cx="3375667" cy="4874890"/>
+                <a:chOff x="4436012" y="1183050"/>
+                <a:chExt cx="3375667" cy="4874890"/>
               </a:xfrm>
-              <a:prstGeom prst="straightConnector1">
-                <a:avLst/>
-              </a:prstGeom>
-              <a:ln w="12700">
-                <a:solidFill>
+            </p:grpSpPr>
+            <p:pic>
+              <p:nvPicPr>
+                <p:cNvPr id="5" name="Picture 4">
+                  <a:extLst>
+                    <a:ext uri="{FF2B5EF4-FFF2-40B4-BE49-F238E27FC236}">
+                      <a16:creationId xmlns:a16="http://schemas.microsoft.com/office/drawing/2014/main" id="{F01F73DD-18FC-13F8-EC8B-3A78F2A8A6C5}"/>
+                    </a:ext>
+                  </a:extLst>
+                </p:cNvPr>
+                <p:cNvPicPr>
+                  <a:picLocks noChangeAspect="1"/>
+                </p:cNvPicPr>
+                <p:nvPr/>
+              </p:nvPicPr>
+              <p:blipFill>
+                <a:blip r:embed="rId2"/>
+                <a:stretch>
+                  <a:fillRect/>
+                </a:stretch>
+              </p:blipFill>
+              <p:spPr>
+                <a:xfrm>
+                  <a:off x="5843516" y="1183050"/>
+                  <a:ext cx="504967" cy="504967"/>
+                </a:xfrm>
+                <a:prstGeom prst="rect">
+                  <a:avLst/>
+                </a:prstGeom>
+              </p:spPr>
+            </p:pic>
+            <p:pic>
+              <p:nvPicPr>
+                <p:cNvPr id="9" name="Picture 8">
+                  <a:extLst>
+                    <a:ext uri="{FF2B5EF4-FFF2-40B4-BE49-F238E27FC236}">
+                      <a16:creationId xmlns:a16="http://schemas.microsoft.com/office/drawing/2014/main" id="{F982C987-837C-5038-A377-4836BE079D3C}"/>
+                    </a:ext>
+                  </a:extLst>
+                </p:cNvPr>
+                <p:cNvPicPr>
+                  <a:picLocks noChangeAspect="1"/>
+                </p:cNvPicPr>
+                <p:nvPr/>
+              </p:nvPicPr>
+              <p:blipFill>
+                <a:blip r:embed="rId3"/>
+                <a:stretch>
+                  <a:fillRect/>
+                </a:stretch>
+              </p:blipFill>
+              <p:spPr>
+                <a:xfrm>
+                  <a:off x="5649605" y="1968205"/>
+                  <a:ext cx="892790" cy="892790"/>
+                </a:xfrm>
+                <a:prstGeom prst="rect">
+                  <a:avLst/>
+                </a:prstGeom>
+              </p:spPr>
+            </p:pic>
+            <p:pic>
+              <p:nvPicPr>
+                <p:cNvPr id="13" name="Picture 12">
+                  <a:extLst>
+                    <a:ext uri="{FF2B5EF4-FFF2-40B4-BE49-F238E27FC236}">
+                      <a16:creationId xmlns:a16="http://schemas.microsoft.com/office/drawing/2014/main" id="{4790AB43-15E0-936B-452E-84E3B6EDD888}"/>
+                    </a:ext>
+                  </a:extLst>
+                </p:cNvPr>
+                <p:cNvPicPr>
+                  <a:picLocks noChangeAspect="1"/>
+                </p:cNvPicPr>
+                <p:nvPr/>
+              </p:nvPicPr>
+              <p:blipFill>
+                <a:blip r:embed="rId4"/>
+                <a:stretch>
+                  <a:fillRect/>
+                </a:stretch>
+              </p:blipFill>
+              <p:spPr>
+                <a:xfrm>
+                  <a:off x="5805558" y="3268983"/>
+                  <a:ext cx="580884" cy="580884"/>
+                </a:xfrm>
+                <a:prstGeom prst="rect">
+                  <a:avLst/>
+                </a:prstGeom>
+              </p:spPr>
+            </p:pic>
+            <p:pic>
+              <p:nvPicPr>
+                <p:cNvPr id="14" name="Picture 13">
+                  <a:extLst>
+                    <a:ext uri="{FF2B5EF4-FFF2-40B4-BE49-F238E27FC236}">
+                      <a16:creationId xmlns:a16="http://schemas.microsoft.com/office/drawing/2014/main" id="{B9587755-9C5B-BAAC-F659-AE0743DA9302}"/>
+                    </a:ext>
+                  </a:extLst>
+                </p:cNvPr>
+                <p:cNvPicPr>
+                  <a:picLocks noChangeAspect="1"/>
+                </p:cNvPicPr>
+                <p:nvPr/>
+              </p:nvPicPr>
+              <p:blipFill>
+                <a:blip r:embed="rId4"/>
+                <a:stretch>
+                  <a:fillRect/>
+                </a:stretch>
+              </p:blipFill>
+              <p:spPr>
+                <a:xfrm>
+                  <a:off x="5068721" y="4103771"/>
+                  <a:ext cx="580884" cy="580884"/>
+                </a:xfrm>
+                <a:prstGeom prst="rect">
+                  <a:avLst/>
+                </a:prstGeom>
+              </p:spPr>
+            </p:pic>
+            <p:pic>
+              <p:nvPicPr>
+                <p:cNvPr id="15" name="Picture 14">
+                  <a:extLst>
+                    <a:ext uri="{FF2B5EF4-FFF2-40B4-BE49-F238E27FC236}">
+                      <a16:creationId xmlns:a16="http://schemas.microsoft.com/office/drawing/2014/main" id="{F375EECA-5596-0D18-F331-FD9EE08B3213}"/>
+                    </a:ext>
+                  </a:extLst>
+                </p:cNvPr>
+                <p:cNvPicPr>
+                  <a:picLocks noChangeAspect="1"/>
+                </p:cNvPicPr>
+                <p:nvPr/>
+              </p:nvPicPr>
+              <p:blipFill>
+                <a:blip r:embed="rId4"/>
+                <a:stretch>
+                  <a:fillRect/>
+                </a:stretch>
+              </p:blipFill>
+              <p:spPr>
+                <a:xfrm>
+                  <a:off x="5805557" y="4103771"/>
+                  <a:ext cx="580884" cy="580884"/>
+                </a:xfrm>
+                <a:prstGeom prst="rect">
+                  <a:avLst/>
+                </a:prstGeom>
+              </p:spPr>
+            </p:pic>
+            <p:pic>
+              <p:nvPicPr>
+                <p:cNvPr id="16" name="Picture 15">
+                  <a:extLst>
+                    <a:ext uri="{FF2B5EF4-FFF2-40B4-BE49-F238E27FC236}">
+                      <a16:creationId xmlns:a16="http://schemas.microsoft.com/office/drawing/2014/main" id="{773884BB-C8ED-56CC-4B34-2AEB1735CD43}"/>
+                    </a:ext>
+                  </a:extLst>
+                </p:cNvPr>
+                <p:cNvPicPr>
+                  <a:picLocks noChangeAspect="1"/>
+                </p:cNvPicPr>
+                <p:nvPr/>
+              </p:nvPicPr>
+              <p:blipFill>
+                <a:blip r:embed="rId4"/>
+                <a:stretch>
+                  <a:fillRect/>
+                </a:stretch>
+              </p:blipFill>
+              <p:spPr>
+                <a:xfrm>
+                  <a:off x="6722233" y="4103771"/>
+                  <a:ext cx="580884" cy="580884"/>
+                </a:xfrm>
+                <a:prstGeom prst="rect">
+                  <a:avLst/>
+                </a:prstGeom>
+              </p:spPr>
+            </p:pic>
+            <p:sp>
+              <p:nvSpPr>
+                <p:cNvPr id="18" name="TextBox 17">
+                  <a:extLst>
+                    <a:ext uri="{FF2B5EF4-FFF2-40B4-BE49-F238E27FC236}">
+                      <a16:creationId xmlns:a16="http://schemas.microsoft.com/office/drawing/2014/main" id="{0E8B5177-2A12-58BC-BBF6-8FCBDF10AEF4}"/>
+                    </a:ext>
+                  </a:extLst>
+                </p:cNvPr>
+                <p:cNvSpPr txBox="1"/>
+                <p:nvPr/>
+              </p:nvSpPr>
+              <p:spPr>
+                <a:xfrm>
+                  <a:off x="6382655" y="4366354"/>
+                  <a:ext cx="343364" cy="369332"/>
+                </a:xfrm>
+                <a:prstGeom prst="rect">
+                  <a:avLst/>
+                </a:prstGeom>
+                <a:noFill/>
+              </p:spPr>
+              <p:txBody>
+                <a:bodyPr wrap="none" rtlCol="0">
+                  <a:spAutoFit/>
+                </a:bodyPr>
+                <a:lstStyle/>
+                <a:p>
+                  <a:r>
+                    <a:rPr lang="en-SG" dirty="0"/>
+                    <a:t>…</a:t>
+                  </a:r>
+                </a:p>
+              </p:txBody>
+            </p:sp>
+            <p:pic>
+              <p:nvPicPr>
+                <p:cNvPr id="22" name="Picture 21">
+                  <a:extLst>
+                    <a:ext uri="{FF2B5EF4-FFF2-40B4-BE49-F238E27FC236}">
+                      <a16:creationId xmlns:a16="http://schemas.microsoft.com/office/drawing/2014/main" id="{C4AD7F46-195D-C98A-52A8-8278CF20E7B7}"/>
+                    </a:ext>
+                  </a:extLst>
+                </p:cNvPr>
+                <p:cNvPicPr>
+                  <a:picLocks noChangeAspect="1"/>
+                </p:cNvPicPr>
+                <p:nvPr/>
+              </p:nvPicPr>
+              <p:blipFill>
+                <a:blip r:embed="rId5"/>
+                <a:stretch>
+                  <a:fillRect/>
+                </a:stretch>
+              </p:blipFill>
+              <p:spPr>
+                <a:xfrm>
+                  <a:off x="5713010" y="5291960"/>
+                  <a:ext cx="765980" cy="765980"/>
+                </a:xfrm>
+                <a:prstGeom prst="rect">
+                  <a:avLst/>
+                </a:prstGeom>
+              </p:spPr>
+            </p:pic>
+            <p:sp>
+              <p:nvSpPr>
+                <p:cNvPr id="23" name="Rectangle: Rounded Corners 22">
+                  <a:extLst>
+                    <a:ext uri="{FF2B5EF4-FFF2-40B4-BE49-F238E27FC236}">
+                      <a16:creationId xmlns:a16="http://schemas.microsoft.com/office/drawing/2014/main" id="{9C5157A7-3AF9-AD88-7DA3-9A2B14E18A35}"/>
+                    </a:ext>
+                  </a:extLst>
+                </p:cNvPr>
+                <p:cNvSpPr/>
+                <p:nvPr/>
+              </p:nvSpPr>
+              <p:spPr>
+                <a:xfrm>
+                  <a:off x="4436012" y="3193376"/>
+                  <a:ext cx="3319976" cy="1644513"/>
+                </a:xfrm>
+                <a:prstGeom prst="roundRect">
+                  <a:avLst/>
+                </a:prstGeom>
+                <a:noFill/>
+                <a:ln>
+                  <a:solidFill>
+                    <a:schemeClr val="tx1"/>
+                  </a:solidFill>
+                </a:ln>
+              </p:spPr>
+              <p:style>
+                <a:lnRef idx="2">
+                  <a:schemeClr val="accent1">
+                    <a:shade val="15000"/>
+                  </a:schemeClr>
+                </a:lnRef>
+                <a:fillRef idx="1">
+                  <a:schemeClr val="accent1"/>
+                </a:fillRef>
+                <a:effectRef idx="0">
+                  <a:schemeClr val="accent1"/>
+                </a:effectRef>
+                <a:fontRef idx="minor">
+                  <a:schemeClr val="lt1"/>
+                </a:fontRef>
+              </p:style>
+              <p:txBody>
+                <a:bodyPr rtlCol="0" anchor="ctr"/>
+                <a:lstStyle/>
+                <a:p>
+                  <a:pPr algn="ctr"/>
+                  <a:endParaRPr lang="en-SG"/>
+                </a:p>
+              </p:txBody>
+            </p:sp>
+            <p:cxnSp>
+              <p:nvCxnSpPr>
+                <p:cNvPr id="25" name="Straight Arrow Connector 24">
+                  <a:extLst>
+                    <a:ext uri="{FF2B5EF4-FFF2-40B4-BE49-F238E27FC236}">
+                      <a16:creationId xmlns:a16="http://schemas.microsoft.com/office/drawing/2014/main" id="{C09E58CC-E959-E282-0600-1BE22D435C82}"/>
+                    </a:ext>
+                  </a:extLst>
+                </p:cNvPr>
+                <p:cNvCxnSpPr>
+                  <a:cxnSpLocks/>
+                </p:cNvCxnSpPr>
+                <p:nvPr/>
+              </p:nvCxnSpPr>
+              <p:spPr>
+                <a:xfrm>
+                  <a:off x="6096000" y="1707472"/>
+                  <a:ext cx="0" cy="307075"/>
+                </a:xfrm>
+                <a:prstGeom prst="straightConnector1">
+                  <a:avLst/>
+                </a:prstGeom>
+                <a:ln w="12700">
+                  <a:solidFill>
+                    <a:schemeClr val="tx1"/>
+                  </a:solidFill>
+                  <a:tailEnd type="triangle"/>
+                </a:ln>
+              </p:spPr>
+              <p:style>
+                <a:lnRef idx="1">
+                  <a:schemeClr val="accent1"/>
+                </a:lnRef>
+                <a:fillRef idx="0">
+                  <a:schemeClr val="accent1"/>
+                </a:fillRef>
+                <a:effectRef idx="0">
+                  <a:schemeClr val="accent1"/>
+                </a:effectRef>
+                <a:fontRef idx="minor">
                   <a:schemeClr val="tx1"/>
-                </a:solidFill>
-                <a:tailEnd type="triangle"/>
-              </a:ln>
-            </p:spPr>
-            <p:style>
-              <a:lnRef idx="1">
-                <a:schemeClr val="accent1"/>
-              </a:lnRef>
-              <a:fillRef idx="0">
-                <a:schemeClr val="accent1"/>
-              </a:fillRef>
-              <a:effectRef idx="0">
-                <a:schemeClr val="accent1"/>
-              </a:effectRef>
-              <a:fontRef idx="minor">
-                <a:schemeClr val="tx1"/>
-              </a:fontRef>
-            </p:style>
-          </p:cxnSp>
-          <p:cxnSp>
-            <p:nvCxnSpPr>
-              <p:cNvPr id="27" name="Straight Arrow Connector 26">
-                <a:extLst>
-                  <a:ext uri="{FF2B5EF4-FFF2-40B4-BE49-F238E27FC236}">
-                    <a16:creationId xmlns:a16="http://schemas.microsoft.com/office/drawing/2014/main" id="{730264DE-EB55-4665-63C5-DF87F7C1825B}"/>
-                  </a:ext>
-                </a:extLst>
-              </p:cNvPr>
-              <p:cNvCxnSpPr>
-                <a:cxnSpLocks/>
-              </p:cNvCxnSpPr>
-              <p:nvPr/>
-            </p:nvCxnSpPr>
-            <p:spPr>
-              <a:xfrm>
-                <a:off x="6095999" y="2803299"/>
-                <a:ext cx="0" cy="307075"/>
-              </a:xfrm>
-              <a:prstGeom prst="straightConnector1">
-                <a:avLst/>
-              </a:prstGeom>
-              <a:ln w="12700">
-                <a:solidFill>
+                </a:fontRef>
+              </p:style>
+            </p:cxnSp>
+            <p:cxnSp>
+              <p:nvCxnSpPr>
+                <p:cNvPr id="27" name="Straight Arrow Connector 26">
+                  <a:extLst>
+                    <a:ext uri="{FF2B5EF4-FFF2-40B4-BE49-F238E27FC236}">
+                      <a16:creationId xmlns:a16="http://schemas.microsoft.com/office/drawing/2014/main" id="{730264DE-EB55-4665-63C5-DF87F7C1825B}"/>
+                    </a:ext>
+                  </a:extLst>
+                </p:cNvPr>
+                <p:cNvCxnSpPr>
+                  <a:cxnSpLocks/>
+                </p:cNvCxnSpPr>
+                <p:nvPr/>
+              </p:nvCxnSpPr>
+              <p:spPr>
+                <a:xfrm>
+                  <a:off x="6095999" y="2803299"/>
+                  <a:ext cx="0" cy="307075"/>
+                </a:xfrm>
+                <a:prstGeom prst="straightConnector1">
+                  <a:avLst/>
+                </a:prstGeom>
+                <a:ln w="12700">
+                  <a:solidFill>
+                    <a:schemeClr val="tx1"/>
+                  </a:solidFill>
+                  <a:tailEnd type="triangle"/>
+                </a:ln>
+              </p:spPr>
+              <p:style>
+                <a:lnRef idx="1">
+                  <a:schemeClr val="accent1"/>
+                </a:lnRef>
+                <a:fillRef idx="0">
+                  <a:schemeClr val="accent1"/>
+                </a:fillRef>
+                <a:effectRef idx="0">
+                  <a:schemeClr val="accent1"/>
+                </a:effectRef>
+                <a:fontRef idx="minor">
                   <a:schemeClr val="tx1"/>
-                </a:solidFill>
-                <a:tailEnd type="triangle"/>
-              </a:ln>
-            </p:spPr>
-            <p:style>
-              <a:lnRef idx="1">
-                <a:schemeClr val="accent1"/>
-              </a:lnRef>
-              <a:fillRef idx="0">
-                <a:schemeClr val="accent1"/>
-              </a:fillRef>
-              <a:effectRef idx="0">
-                <a:schemeClr val="accent1"/>
-              </a:effectRef>
-              <a:fontRef idx="minor">
-                <a:schemeClr val="tx1"/>
-              </a:fontRef>
-            </p:style>
-          </p:cxnSp>
-          <p:sp>
-            <p:nvSpPr>
-              <p:cNvPr id="28" name="TextBox 27">
-                <a:extLst>
-                  <a:ext uri="{FF2B5EF4-FFF2-40B4-BE49-F238E27FC236}">
-                    <a16:creationId xmlns:a16="http://schemas.microsoft.com/office/drawing/2014/main" id="{98C2E049-C685-8EC7-5090-2030BE7D9343}"/>
-                  </a:ext>
-                </a:extLst>
-              </p:cNvPr>
-              <p:cNvSpPr txBox="1"/>
-              <p:nvPr/>
-            </p:nvSpPr>
-            <p:spPr>
-              <a:xfrm>
-                <a:off x="6382655" y="3460554"/>
-                <a:ext cx="532517" cy="338554"/>
-              </a:xfrm>
-              <a:prstGeom prst="rect">
-                <a:avLst/>
-              </a:prstGeom>
-              <a:noFill/>
-            </p:spPr>
-            <p:txBody>
-              <a:bodyPr wrap="none" rtlCol="0">
-                <a:spAutoFit/>
-              </a:bodyPr>
-              <a:lstStyle/>
-              <a:p>
-                <a:pPr algn="ctr"/>
-                <a:r>
-                  <a:rPr lang="en-SG" sz="800" dirty="0"/>
-                  <a:t>Routing </a:t>
-                </a:r>
-              </a:p>
-              <a:p>
-                <a:pPr algn="ctr"/>
-                <a:r>
-                  <a:rPr lang="en-SG" sz="800" dirty="0"/>
-                  <a:t>Agent</a:t>
-                </a:r>
-              </a:p>
-            </p:txBody>
-          </p:sp>
-          <p:cxnSp>
-            <p:nvCxnSpPr>
-              <p:cNvPr id="30" name="Connector: Elbow 29">
-                <a:extLst>
-                  <a:ext uri="{FF2B5EF4-FFF2-40B4-BE49-F238E27FC236}">
-                    <a16:creationId xmlns:a16="http://schemas.microsoft.com/office/drawing/2014/main" id="{B68260B9-C1EF-3E36-28E4-37B0B5DED902}"/>
-                  </a:ext>
-                </a:extLst>
-              </p:cNvPr>
-              <p:cNvCxnSpPr>
-                <a:stCxn id="13" idx="2"/>
-                <a:endCxn id="14" idx="0"/>
-              </p:cNvCxnSpPr>
-              <p:nvPr/>
-            </p:nvCxnSpPr>
-            <p:spPr>
-              <a:xfrm rot="5400000">
-                <a:off x="5600630" y="3608401"/>
-                <a:ext cx="253904" cy="736837"/>
-              </a:xfrm>
-              <a:prstGeom prst="bentConnector3">
-                <a:avLst/>
-              </a:prstGeom>
-              <a:ln w="12700">
-                <a:solidFill>
+                </a:fontRef>
+              </p:style>
+            </p:cxnSp>
+            <p:sp>
+              <p:nvSpPr>
+                <p:cNvPr id="28" name="TextBox 27">
+                  <a:extLst>
+                    <a:ext uri="{FF2B5EF4-FFF2-40B4-BE49-F238E27FC236}">
+                      <a16:creationId xmlns:a16="http://schemas.microsoft.com/office/drawing/2014/main" id="{98C2E049-C685-8EC7-5090-2030BE7D9343}"/>
+                    </a:ext>
+                  </a:extLst>
+                </p:cNvPr>
+                <p:cNvSpPr txBox="1"/>
+                <p:nvPr/>
+              </p:nvSpPr>
+              <p:spPr>
+                <a:xfrm>
+                  <a:off x="6382655" y="3460554"/>
+                  <a:ext cx="532517" cy="338554"/>
+                </a:xfrm>
+                <a:prstGeom prst="rect">
+                  <a:avLst/>
+                </a:prstGeom>
+                <a:noFill/>
+              </p:spPr>
+              <p:txBody>
+                <a:bodyPr wrap="none" rtlCol="0">
+                  <a:spAutoFit/>
+                </a:bodyPr>
+                <a:lstStyle/>
+                <a:p>
+                  <a:pPr algn="ctr"/>
+                  <a:r>
+                    <a:rPr lang="en-SG" sz="800" dirty="0"/>
+                    <a:t>Routing </a:t>
+                  </a:r>
+                </a:p>
+                <a:p>
+                  <a:pPr algn="ctr"/>
+                  <a:r>
+                    <a:rPr lang="en-SG" sz="800" dirty="0"/>
+                    <a:t>Agent</a:t>
+                  </a:r>
+                </a:p>
+              </p:txBody>
+            </p:sp>
+            <p:cxnSp>
+              <p:nvCxnSpPr>
+                <p:cNvPr id="30" name="Connector: Elbow 29">
+                  <a:extLst>
+                    <a:ext uri="{FF2B5EF4-FFF2-40B4-BE49-F238E27FC236}">
+                      <a16:creationId xmlns:a16="http://schemas.microsoft.com/office/drawing/2014/main" id="{B68260B9-C1EF-3E36-28E4-37B0B5DED902}"/>
+                    </a:ext>
+                  </a:extLst>
+                </p:cNvPr>
+                <p:cNvCxnSpPr>
+                  <a:stCxn id="13" idx="2"/>
+                  <a:endCxn id="14" idx="0"/>
+                </p:cNvCxnSpPr>
+                <p:nvPr/>
+              </p:nvCxnSpPr>
+              <p:spPr>
+                <a:xfrm rot="5400000">
+                  <a:off x="5600630" y="3608401"/>
+                  <a:ext cx="253904" cy="736837"/>
+                </a:xfrm>
+                <a:prstGeom prst="bentConnector3">
+                  <a:avLst/>
+                </a:prstGeom>
+                <a:ln w="12700">
+                  <a:solidFill>
+                    <a:schemeClr val="tx1"/>
+                  </a:solidFill>
+                  <a:tailEnd type="triangle"/>
+                </a:ln>
+              </p:spPr>
+              <p:style>
+                <a:lnRef idx="1">
+                  <a:schemeClr val="accent1"/>
+                </a:lnRef>
+                <a:fillRef idx="0">
+                  <a:schemeClr val="accent1"/>
+                </a:fillRef>
+                <a:effectRef idx="0">
+                  <a:schemeClr val="accent1"/>
+                </a:effectRef>
+                <a:fontRef idx="minor">
                   <a:schemeClr val="tx1"/>
-                </a:solidFill>
-                <a:tailEnd type="triangle"/>
-              </a:ln>
-            </p:spPr>
-            <p:style>
-              <a:lnRef idx="1">
-                <a:schemeClr val="accent1"/>
-              </a:lnRef>
-              <a:fillRef idx="0">
-                <a:schemeClr val="accent1"/>
-              </a:fillRef>
-              <a:effectRef idx="0">
-                <a:schemeClr val="accent1"/>
-              </a:effectRef>
-              <a:fontRef idx="minor">
-                <a:schemeClr val="tx1"/>
-              </a:fontRef>
-            </p:style>
-          </p:cxnSp>
-          <p:cxnSp>
-            <p:nvCxnSpPr>
-              <p:cNvPr id="32" name="Connector: Elbow 31">
-                <a:extLst>
-                  <a:ext uri="{FF2B5EF4-FFF2-40B4-BE49-F238E27FC236}">
-                    <a16:creationId xmlns:a16="http://schemas.microsoft.com/office/drawing/2014/main" id="{CB0BFAEA-D3A8-4EB5-87CE-0FE5C1CB0C6D}"/>
-                  </a:ext>
-                </a:extLst>
-              </p:cNvPr>
-              <p:cNvCxnSpPr>
-                <a:stCxn id="13" idx="2"/>
-                <a:endCxn id="15" idx="0"/>
-              </p:cNvCxnSpPr>
-              <p:nvPr/>
-            </p:nvCxnSpPr>
-            <p:spPr>
-              <a:xfrm rot="5400000">
-                <a:off x="5969048" y="3976819"/>
-                <a:ext cx="253904" cy="1"/>
-              </a:xfrm>
-              <a:prstGeom prst="bentConnector3">
-                <a:avLst/>
-              </a:prstGeom>
-              <a:ln w="12700">
-                <a:solidFill>
+                </a:fontRef>
+              </p:style>
+            </p:cxnSp>
+            <p:cxnSp>
+              <p:nvCxnSpPr>
+                <p:cNvPr id="32" name="Connector: Elbow 31">
+                  <a:extLst>
+                    <a:ext uri="{FF2B5EF4-FFF2-40B4-BE49-F238E27FC236}">
+                      <a16:creationId xmlns:a16="http://schemas.microsoft.com/office/drawing/2014/main" id="{CB0BFAEA-D3A8-4EB5-87CE-0FE5C1CB0C6D}"/>
+                    </a:ext>
+                  </a:extLst>
+                </p:cNvPr>
+                <p:cNvCxnSpPr>
+                  <a:stCxn id="13" idx="2"/>
+                  <a:endCxn id="15" idx="0"/>
+                </p:cNvCxnSpPr>
+                <p:nvPr/>
+              </p:nvCxnSpPr>
+              <p:spPr>
+                <a:xfrm rot="5400000">
+                  <a:off x="5969048" y="3976819"/>
+                  <a:ext cx="253904" cy="1"/>
+                </a:xfrm>
+                <a:prstGeom prst="bentConnector3">
+                  <a:avLst/>
+                </a:prstGeom>
+                <a:ln w="12700">
+                  <a:solidFill>
+                    <a:schemeClr val="tx1"/>
+                  </a:solidFill>
+                  <a:tailEnd type="triangle"/>
+                </a:ln>
+              </p:spPr>
+              <p:style>
+                <a:lnRef idx="1">
+                  <a:schemeClr val="accent1"/>
+                </a:lnRef>
+                <a:fillRef idx="0">
+                  <a:schemeClr val="accent1"/>
+                </a:fillRef>
+                <a:effectRef idx="0">
+                  <a:schemeClr val="accent1"/>
+                </a:effectRef>
+                <a:fontRef idx="minor">
                   <a:schemeClr val="tx1"/>
-                </a:solidFill>
-                <a:tailEnd type="triangle"/>
-              </a:ln>
-            </p:spPr>
-            <p:style>
-              <a:lnRef idx="1">
-                <a:schemeClr val="accent1"/>
-              </a:lnRef>
-              <a:fillRef idx="0">
-                <a:schemeClr val="accent1"/>
-              </a:fillRef>
-              <a:effectRef idx="0">
-                <a:schemeClr val="accent1"/>
-              </a:effectRef>
-              <a:fontRef idx="minor">
-                <a:schemeClr val="tx1"/>
-              </a:fontRef>
-            </p:style>
-          </p:cxnSp>
-          <p:cxnSp>
-            <p:nvCxnSpPr>
-              <p:cNvPr id="33" name="Connector: Elbow 32">
-                <a:extLst>
-                  <a:ext uri="{FF2B5EF4-FFF2-40B4-BE49-F238E27FC236}">
-                    <a16:creationId xmlns:a16="http://schemas.microsoft.com/office/drawing/2014/main" id="{8FEB4FE7-380A-1F34-ABCA-42E7C83E81F2}"/>
-                  </a:ext>
-                </a:extLst>
-              </p:cNvPr>
-              <p:cNvCxnSpPr>
-                <a:cxnSpLocks/>
-                <a:stCxn id="13" idx="2"/>
-                <a:endCxn id="16" idx="0"/>
-              </p:cNvCxnSpPr>
-              <p:nvPr/>
-            </p:nvCxnSpPr>
-            <p:spPr>
-              <a:xfrm rot="16200000" flipH="1">
-                <a:off x="6427385" y="3518481"/>
-                <a:ext cx="253904" cy="916675"/>
-              </a:xfrm>
-              <a:prstGeom prst="bentConnector3">
-                <a:avLst>
-                  <a:gd name="adj1" fmla="val 50000"/>
-                </a:avLst>
-              </a:prstGeom>
-              <a:ln w="12700">
-                <a:solidFill>
+                </a:fontRef>
+              </p:style>
+            </p:cxnSp>
+            <p:cxnSp>
+              <p:nvCxnSpPr>
+                <p:cNvPr id="33" name="Connector: Elbow 32">
+                  <a:extLst>
+                    <a:ext uri="{FF2B5EF4-FFF2-40B4-BE49-F238E27FC236}">
+                      <a16:creationId xmlns:a16="http://schemas.microsoft.com/office/drawing/2014/main" id="{8FEB4FE7-380A-1F34-ABCA-42E7C83E81F2}"/>
+                    </a:ext>
+                  </a:extLst>
+                </p:cNvPr>
+                <p:cNvCxnSpPr>
+                  <a:cxnSpLocks/>
+                  <a:stCxn id="13" idx="2"/>
+                  <a:endCxn id="16" idx="0"/>
+                </p:cNvCxnSpPr>
+                <p:nvPr/>
+              </p:nvCxnSpPr>
+              <p:spPr>
+                <a:xfrm rot="16200000" flipH="1">
+                  <a:off x="6427385" y="3518481"/>
+                  <a:ext cx="253904" cy="916675"/>
+                </a:xfrm>
+                <a:prstGeom prst="bentConnector3">
+                  <a:avLst>
+                    <a:gd name="adj1" fmla="val 50000"/>
+                  </a:avLst>
+                </a:prstGeom>
+                <a:ln w="12700">
+                  <a:solidFill>
+                    <a:schemeClr val="tx1"/>
+                  </a:solidFill>
+                  <a:tailEnd type="triangle"/>
+                </a:ln>
+              </p:spPr>
+              <p:style>
+                <a:lnRef idx="1">
+                  <a:schemeClr val="accent1"/>
+                </a:lnRef>
+                <a:fillRef idx="0">
+                  <a:schemeClr val="accent1"/>
+                </a:fillRef>
+                <a:effectRef idx="0">
+                  <a:schemeClr val="accent1"/>
+                </a:effectRef>
+                <a:fontRef idx="minor">
                   <a:schemeClr val="tx1"/>
-                </a:solidFill>
-                <a:tailEnd type="triangle"/>
-              </a:ln>
-            </p:spPr>
-            <p:style>
-              <a:lnRef idx="1">
-                <a:schemeClr val="accent1"/>
-              </a:lnRef>
-              <a:fillRef idx="0">
-                <a:schemeClr val="accent1"/>
-              </a:fillRef>
-              <a:effectRef idx="0">
-                <a:schemeClr val="accent1"/>
-              </a:effectRef>
-              <a:fontRef idx="minor">
-                <a:schemeClr val="tx1"/>
-              </a:fontRef>
-            </p:style>
-          </p:cxnSp>
-          <p:sp>
-            <p:nvSpPr>
-              <p:cNvPr id="36" name="TextBox 35">
-                <a:extLst>
-                  <a:ext uri="{FF2B5EF4-FFF2-40B4-BE49-F238E27FC236}">
-                    <a16:creationId xmlns:a16="http://schemas.microsoft.com/office/drawing/2014/main" id="{14B1ECA2-C127-A437-15EC-8A70BC528DFA}"/>
-                  </a:ext>
-                </a:extLst>
-              </p:cNvPr>
-              <p:cNvSpPr txBox="1"/>
-              <p:nvPr/>
-            </p:nvSpPr>
-            <p:spPr>
-              <a:xfrm>
-                <a:off x="7027489" y="3976818"/>
-                <a:ext cx="784190" cy="338554"/>
-              </a:xfrm>
-              <a:prstGeom prst="rect">
-                <a:avLst/>
-              </a:prstGeom>
-              <a:noFill/>
-            </p:spPr>
-            <p:txBody>
-              <a:bodyPr wrap="none" rtlCol="0">
-                <a:spAutoFit/>
-              </a:bodyPr>
-              <a:lstStyle/>
-              <a:p>
-                <a:pPr algn="ctr"/>
-                <a:r>
-                  <a:rPr lang="en-SG" sz="800" dirty="0"/>
-                  <a:t>Task-oriented </a:t>
-                </a:r>
-              </a:p>
-              <a:p>
-                <a:pPr algn="ctr"/>
-                <a:r>
-                  <a:rPr lang="en-SG" sz="800" dirty="0"/>
-                  <a:t>Agents</a:t>
-                </a:r>
-              </a:p>
-            </p:txBody>
-          </p:sp>
-          <p:cxnSp>
-            <p:nvCxnSpPr>
-              <p:cNvPr id="37" name="Straight Arrow Connector 36">
-                <a:extLst>
-                  <a:ext uri="{FF2B5EF4-FFF2-40B4-BE49-F238E27FC236}">
-                    <a16:creationId xmlns:a16="http://schemas.microsoft.com/office/drawing/2014/main" id="{0CC7DB8B-4950-E34A-69C0-A8E73DBBA0CA}"/>
-                  </a:ext>
-                </a:extLst>
-              </p:cNvPr>
-              <p:cNvCxnSpPr>
-                <a:cxnSpLocks/>
-              </p:cNvCxnSpPr>
-              <p:nvPr/>
-            </p:nvCxnSpPr>
-            <p:spPr>
-              <a:xfrm>
-                <a:off x="6095999" y="4894746"/>
-                <a:ext cx="0" cy="307075"/>
-              </a:xfrm>
-              <a:prstGeom prst="straightConnector1">
-                <a:avLst/>
-              </a:prstGeom>
-              <a:ln w="12700">
-                <a:solidFill>
+                </a:fontRef>
+              </p:style>
+            </p:cxnSp>
+            <p:sp>
+              <p:nvSpPr>
+                <p:cNvPr id="36" name="TextBox 35">
+                  <a:extLst>
+                    <a:ext uri="{FF2B5EF4-FFF2-40B4-BE49-F238E27FC236}">
+                      <a16:creationId xmlns:a16="http://schemas.microsoft.com/office/drawing/2014/main" id="{14B1ECA2-C127-A437-15EC-8A70BC528DFA}"/>
+                    </a:ext>
+                  </a:extLst>
+                </p:cNvPr>
+                <p:cNvSpPr txBox="1"/>
+                <p:nvPr/>
+              </p:nvSpPr>
+              <p:spPr>
+                <a:xfrm>
+                  <a:off x="7027489" y="3976818"/>
+                  <a:ext cx="784190" cy="338554"/>
+                </a:xfrm>
+                <a:prstGeom prst="rect">
+                  <a:avLst/>
+                </a:prstGeom>
+                <a:noFill/>
+              </p:spPr>
+              <p:txBody>
+                <a:bodyPr wrap="none" rtlCol="0">
+                  <a:spAutoFit/>
+                </a:bodyPr>
+                <a:lstStyle/>
+                <a:p>
+                  <a:pPr algn="ctr"/>
+                  <a:r>
+                    <a:rPr lang="en-SG" sz="800" dirty="0"/>
+                    <a:t>Task-oriented </a:t>
+                  </a:r>
+                </a:p>
+                <a:p>
+                  <a:pPr algn="ctr"/>
+                  <a:r>
+                    <a:rPr lang="en-SG" sz="800" dirty="0"/>
+                    <a:t>Agents</a:t>
+                  </a:r>
+                </a:p>
+              </p:txBody>
+            </p:sp>
+            <p:cxnSp>
+              <p:nvCxnSpPr>
+                <p:cNvPr id="37" name="Straight Arrow Connector 36">
+                  <a:extLst>
+                    <a:ext uri="{FF2B5EF4-FFF2-40B4-BE49-F238E27FC236}">
+                      <a16:creationId xmlns:a16="http://schemas.microsoft.com/office/drawing/2014/main" id="{0CC7DB8B-4950-E34A-69C0-A8E73DBBA0CA}"/>
+                    </a:ext>
+                  </a:extLst>
+                </p:cNvPr>
+                <p:cNvCxnSpPr>
+                  <a:cxnSpLocks/>
+                </p:cNvCxnSpPr>
+                <p:nvPr/>
+              </p:nvCxnSpPr>
+              <p:spPr>
+                <a:xfrm>
+                  <a:off x="6095999" y="4894746"/>
+                  <a:ext cx="0" cy="307075"/>
+                </a:xfrm>
+                <a:prstGeom prst="straightConnector1">
+                  <a:avLst/>
+                </a:prstGeom>
+                <a:ln w="12700">
+                  <a:solidFill>
+                    <a:schemeClr val="tx1"/>
+                  </a:solidFill>
+                  <a:tailEnd type="triangle"/>
+                </a:ln>
+              </p:spPr>
+              <p:style>
+                <a:lnRef idx="1">
+                  <a:schemeClr val="accent1"/>
+                </a:lnRef>
+                <a:fillRef idx="0">
+                  <a:schemeClr val="accent1"/>
+                </a:fillRef>
+                <a:effectRef idx="0">
+                  <a:schemeClr val="accent1"/>
+                </a:effectRef>
+                <a:fontRef idx="minor">
                   <a:schemeClr val="tx1"/>
-                </a:solidFill>
-                <a:tailEnd type="triangle"/>
-              </a:ln>
-            </p:spPr>
-            <p:style>
-              <a:lnRef idx="1">
-                <a:schemeClr val="accent1"/>
-              </a:lnRef>
-              <a:fillRef idx="0">
-                <a:schemeClr val="accent1"/>
-              </a:fillRef>
-              <a:effectRef idx="0">
-                <a:schemeClr val="accent1"/>
-              </a:effectRef>
-              <a:fontRef idx="minor">
-                <a:schemeClr val="tx1"/>
-              </a:fontRef>
-            </p:style>
-          </p:cxnSp>
-          <p:cxnSp>
-            <p:nvCxnSpPr>
-              <p:cNvPr id="38" name="Connector: Elbow 37">
-                <a:extLst>
-                  <a:ext uri="{FF2B5EF4-FFF2-40B4-BE49-F238E27FC236}">
-                    <a16:creationId xmlns:a16="http://schemas.microsoft.com/office/drawing/2014/main" id="{5621525F-495A-9DD8-548A-1B66DE062E02}"/>
-                  </a:ext>
-                </a:extLst>
-              </p:cNvPr>
-              <p:cNvCxnSpPr>
-                <a:cxnSpLocks/>
-                <a:stCxn id="22" idx="3"/>
-                <a:endCxn id="9" idx="3"/>
-              </p:cNvCxnSpPr>
-              <p:nvPr/>
-            </p:nvCxnSpPr>
-            <p:spPr>
-              <a:xfrm flipV="1">
-                <a:off x="6478990" y="2414600"/>
-                <a:ext cx="63405" cy="3260350"/>
-              </a:xfrm>
-              <a:prstGeom prst="bentConnector3">
-                <a:avLst>
-                  <a:gd name="adj1" fmla="val 2782311"/>
-                </a:avLst>
-              </a:prstGeom>
-              <a:ln w="12700">
-                <a:solidFill>
+                </a:fontRef>
+              </p:style>
+            </p:cxnSp>
+            <p:cxnSp>
+              <p:nvCxnSpPr>
+                <p:cNvPr id="38" name="Connector: Elbow 37">
+                  <a:extLst>
+                    <a:ext uri="{FF2B5EF4-FFF2-40B4-BE49-F238E27FC236}">
+                      <a16:creationId xmlns:a16="http://schemas.microsoft.com/office/drawing/2014/main" id="{5621525F-495A-9DD8-548A-1B66DE062E02}"/>
+                    </a:ext>
+                  </a:extLst>
+                </p:cNvPr>
+                <p:cNvCxnSpPr>
+                  <a:cxnSpLocks/>
+                  <a:stCxn id="22" idx="3"/>
+                  <a:endCxn id="9" idx="3"/>
+                </p:cNvCxnSpPr>
+                <p:nvPr/>
+              </p:nvCxnSpPr>
+              <p:spPr>
+                <a:xfrm flipV="1">
+                  <a:off x="6478990" y="2414600"/>
+                  <a:ext cx="63405" cy="3260350"/>
+                </a:xfrm>
+                <a:prstGeom prst="bentConnector3">
+                  <a:avLst>
+                    <a:gd name="adj1" fmla="val 2782311"/>
+                  </a:avLst>
+                </a:prstGeom>
+                <a:ln w="12700">
+                  <a:solidFill>
+                    <a:schemeClr val="tx1"/>
+                  </a:solidFill>
+                  <a:tailEnd type="triangle"/>
+                </a:ln>
+              </p:spPr>
+              <p:style>
+                <a:lnRef idx="1">
+                  <a:schemeClr val="accent1"/>
+                </a:lnRef>
+                <a:fillRef idx="0">
+                  <a:schemeClr val="accent1"/>
+                </a:fillRef>
+                <a:effectRef idx="0">
+                  <a:schemeClr val="accent1"/>
+                </a:effectRef>
+                <a:fontRef idx="minor">
                   <a:schemeClr val="tx1"/>
-                </a:solidFill>
-                <a:tailEnd type="triangle"/>
-              </a:ln>
-            </p:spPr>
-            <p:style>
-              <a:lnRef idx="1">
-                <a:schemeClr val="accent1"/>
-              </a:lnRef>
-              <a:fillRef idx="0">
-                <a:schemeClr val="accent1"/>
-              </a:fillRef>
-              <a:effectRef idx="0">
-                <a:schemeClr val="accent1"/>
-              </a:effectRef>
-              <a:fontRef idx="minor">
-                <a:schemeClr val="tx1"/>
-              </a:fontRef>
-            </p:style>
-          </p:cxnSp>
+                </a:fontRef>
+              </p:style>
+            </p:cxnSp>
+          </p:grpSp>
         </p:grpSp>
+        <p:sp>
+          <p:nvSpPr>
+            <p:cNvPr id="45" name="TextBox 44">
+              <a:extLst>
+                <a:ext uri="{FF2B5EF4-FFF2-40B4-BE49-F238E27FC236}">
+                  <a16:creationId xmlns:a16="http://schemas.microsoft.com/office/drawing/2014/main" id="{2212B338-23E1-8A65-468F-68D73F07D4C6}"/>
+                </a:ext>
+              </a:extLst>
+            </p:cNvPr>
+            <p:cNvSpPr txBox="1"/>
+            <p:nvPr/>
+          </p:nvSpPr>
+          <p:spPr>
+            <a:xfrm>
+              <a:off x="4681435" y="2267255"/>
+              <a:ext cx="995786" cy="215444"/>
+            </a:xfrm>
+            <a:prstGeom prst="rect">
+              <a:avLst/>
+            </a:prstGeom>
+            <a:noFill/>
+          </p:spPr>
+          <p:txBody>
+            <a:bodyPr wrap="none" rtlCol="0">
+              <a:spAutoFit/>
+            </a:bodyPr>
+            <a:lstStyle/>
+            <a:p>
+              <a:pPr algn="ctr"/>
+              <a:r>
+                <a:rPr lang="en-SG" sz="800" dirty="0"/>
+                <a:t>Web Chat Interface</a:t>
+              </a:r>
+            </a:p>
+          </p:txBody>
+        </p:sp>
+        <p:sp>
+          <p:nvSpPr>
+            <p:cNvPr id="46" name="TextBox 45">
+              <a:extLst>
+                <a:ext uri="{FF2B5EF4-FFF2-40B4-BE49-F238E27FC236}">
+                  <a16:creationId xmlns:a16="http://schemas.microsoft.com/office/drawing/2014/main" id="{1FE53E1D-153F-33B8-3BBE-D82F599A3911}"/>
+                </a:ext>
+              </a:extLst>
+            </p:cNvPr>
+            <p:cNvSpPr txBox="1"/>
+            <p:nvPr/>
+          </p:nvSpPr>
+          <p:spPr>
+            <a:xfrm>
+              <a:off x="4630463" y="5595050"/>
+              <a:ext cx="1087157" cy="215444"/>
+            </a:xfrm>
+            <a:prstGeom prst="rect">
+              <a:avLst/>
+            </a:prstGeom>
+            <a:noFill/>
+          </p:spPr>
+          <p:txBody>
+            <a:bodyPr wrap="none" rtlCol="0">
+              <a:spAutoFit/>
+            </a:bodyPr>
+            <a:lstStyle/>
+            <a:p>
+              <a:pPr algn="ctr"/>
+              <a:r>
+                <a:rPr lang="en-SG" sz="800" dirty="0"/>
+                <a:t>Response Synthesizer</a:t>
+              </a:r>
+            </a:p>
+          </p:txBody>
+        </p:sp>
       </p:grpSp>
-      <p:sp>
-        <p:nvSpPr>
-          <p:cNvPr id="45" name="TextBox 44">
-            <a:extLst>
-              <a:ext uri="{FF2B5EF4-FFF2-40B4-BE49-F238E27FC236}">
-                <a16:creationId xmlns:a16="http://schemas.microsoft.com/office/drawing/2014/main" id="{2212B338-23E1-8A65-468F-68D73F07D4C6}"/>
-              </a:ext>
-            </a:extLst>
-          </p:cNvPr>
-          <p:cNvSpPr txBox="1"/>
-          <p:nvPr/>
-        </p:nvSpPr>
-        <p:spPr>
-          <a:xfrm>
-            <a:off x="4681435" y="2267255"/>
-            <a:ext cx="995786" cy="215444"/>
-          </a:xfrm>
-          <a:prstGeom prst="rect">
-            <a:avLst/>
-          </a:prstGeom>
-          <a:noFill/>
-        </p:spPr>
-        <p:txBody>
-          <a:bodyPr wrap="none" rtlCol="0">
-            <a:spAutoFit/>
-          </a:bodyPr>
-          <a:lstStyle/>
-          <a:p>
-            <a:pPr algn="ctr"/>
-            <a:r>
-              <a:rPr lang="en-SG" sz="800" dirty="0"/>
-              <a:t>Web Chat Interface</a:t>
-            </a:r>
-          </a:p>
-        </p:txBody>
-      </p:sp>
-      <p:sp>
-        <p:nvSpPr>
-          <p:cNvPr id="46" name="TextBox 45">
-            <a:extLst>
-              <a:ext uri="{FF2B5EF4-FFF2-40B4-BE49-F238E27FC236}">
-                <a16:creationId xmlns:a16="http://schemas.microsoft.com/office/drawing/2014/main" id="{1FE53E1D-153F-33B8-3BBE-D82F599A3911}"/>
-              </a:ext>
-            </a:extLst>
-          </p:cNvPr>
-          <p:cNvSpPr txBox="1"/>
-          <p:nvPr/>
-        </p:nvSpPr>
-        <p:spPr>
-          <a:xfrm>
-            <a:off x="4630463" y="5595050"/>
-            <a:ext cx="1087157" cy="215444"/>
-          </a:xfrm>
-          <a:prstGeom prst="rect">
-            <a:avLst/>
-          </a:prstGeom>
-          <a:noFill/>
-        </p:spPr>
-        <p:txBody>
-          <a:bodyPr wrap="none" rtlCol="0">
-            <a:spAutoFit/>
-          </a:bodyPr>
-          <a:lstStyle/>
-          <a:p>
-            <a:pPr algn="ctr"/>
-            <a:r>
-              <a:rPr lang="en-SG" sz="800" dirty="0"/>
-              <a:t>Response Synthesizer</a:t>
-            </a:r>
-          </a:p>
-        </p:txBody>
-      </p:sp>
     </p:spTree>
     <p:extLst>
       <p:ext uri="{BB962C8B-B14F-4D97-AF65-F5344CB8AC3E}">
